--- a/docs/presentation/SIH26181_EdgeGuard_Presentation.pptx
+++ b/docs/presentation/SIH26181_EdgeGuard_Presentation.pptx
@@ -1,5 +1,76 @@
 
-<file path=ppt/presentation.xml><?xml version="1.0" encoding="utf-8"?>
+<file path=docProps\app.xml><?xml version="1.0" encoding="utf-8"?>
+<Properties xmlns="http://schemas.openxmlformats.org/officeDocument/2006/extended-properties" xmlns:vt="http://schemas.openxmlformats.org/officeDocument/2006/docPropsVTypes">
+  <TotalTime>1</TotalTime>
+  <Words>0</Words>
+  <Application>Microsoft Macintosh PowerPoint</Application>
+  <PresentationFormat>On-screen Show (4:3)</PresentationFormat>
+  <Paragraphs>0</Paragraphs>
+  <Slides>0</Slides>
+  <Notes>0</Notes>
+  <HiddenSlides>0</HiddenSlides>
+  <MMClips>0</MMClips>
+  <ScaleCrop>false</ScaleCrop>
+  <HeadingPairs>
+    <vt:vector size="4" baseType="variant">
+      <vt:variant>
+        <vt:lpstr>Theme</vt:lpstr>
+      </vt:variant>
+      <vt:variant>
+        <vt:i4>1</vt:i4>
+      </vt:variant>
+      <vt:variant>
+        <vt:lpstr>Slide Titles</vt:lpstr>
+      </vt:variant>
+      <vt:variant>
+        <vt:i4>0</vt:i4>
+      </vt:variant>
+    </vt:vector>
+  </HeadingPairs>
+  <TitlesOfParts>
+    <vt:vector size="1" baseType="lpstr">
+      <vt:lpstr>Office Theme</vt:lpstr>
+    </vt:vector>
+  </TitlesOfParts>
+  <Manager/>
+  <Company/>
+  <LinksUpToDate>false</LinksUpToDate>
+  <SharedDoc>false</SharedDoc>
+  <HyperlinkBase/>
+  <HyperlinksChanged>false</HyperlinksChanged>
+  <AppVersion>14.0000</AppVersion>
+</Properties>
+</file>
+
+<file path=docProps\core.xml><?xml version="1.0" encoding="utf-8"?>
+<cp:coreProperties xmlns:cp="http://schemas.openxmlformats.org/package/2006/metadata/core-properties" xmlns:dc="http://purl.org/dc/elements/1.1/" xmlns:dcterms="http://purl.org/dc/terms/" xmlns:dcmitype="http://purl.org/dc/dcmitype/" xmlns:xsi="http://www.w3.org/2001/XMLSchema-instance">
+  <dc:title/>
+  <dc:subject/>
+  <dc:creator/>
+  <cp:keywords/>
+  <dc:description>generated using python-pptx</dc:description>
+  <cp:lastModifiedBy>Steve Canny</cp:lastModifiedBy>
+  <cp:revision>1</cp:revision>
+  <dcterms:created xsi:type="dcterms:W3CDTF">2013-01-27T09:14:16Z</dcterms:created>
+  <dcterms:modified xsi:type="dcterms:W3CDTF">2013-01-27T09:15:58Z</dcterms:modified>
+  <cp:category/>
+</cp:coreProperties>
+</file>
+
+<file path=ppt\presProps.xml><?xml version="1.0" encoding="utf-8"?>
+<p:presentationPr xmlns:a="http://schemas.openxmlformats.org/drawingml/2006/main" xmlns:r="http://schemas.openxmlformats.org/officeDocument/2006/relationships" xmlns:p="http://schemas.openxmlformats.org/presentationml/2006/main">
+  <p:extLst>
+    <p:ext uri="{E76CE94A-603C-4142-B9EB-6D1370010A27}">
+      <p14:discardImageEditData xmlns:p14="http://schemas.microsoft.com/office/powerpoint/2010/main" val="0"/>
+    </p:ext>
+    <p:ext uri="{D31A062A-798A-4329-ABDD-BBA856620510}">
+      <p14:defaultImageDpi xmlns:p14="http://schemas.microsoft.com/office/powerpoint/2010/main" val="0"/>
+    </p:ext>
+  </p:extLst>
+</p:presentationPr>
+</file>
+
+<file path=ppt\presentation.xml><?xml version="1.0" encoding="utf-8"?>
 <p:presentation xmlns:a="http://schemas.openxmlformats.org/drawingml/2006/main" xmlns:r="http://schemas.openxmlformats.org/officeDocument/2006/relationships" xmlns:p="http://schemas.openxmlformats.org/presentationml/2006/main" saveSubsetFonts="1" autoCompressPictures="0">
   <p:sldMasterIdLst>
     <p:sldMasterId id="2147483648" r:id="rId1"/>
@@ -113,7 +184,7 @@
 </p:presentation>
 </file>
 
-<file path=ppt/slideLayouts/slideLayout1.xml><?xml version="1.0" encoding="utf-8"?>
+<file path=ppt\slideLayouts\slideLayout1.xml><?xml version="1.0" encoding="utf-8"?>
 <p:sldLayout xmlns:a="http://schemas.openxmlformats.org/drawingml/2006/main" xmlns:r="http://schemas.openxmlformats.org/officeDocument/2006/relationships" xmlns:p="http://schemas.openxmlformats.org/presentationml/2006/main" type="title" preserve="1">
   <p:cSld name="Title Slide">
     <p:spTree>
@@ -355,7 +426,7 @@
 </p:sldLayout>
 </file>
 
-<file path=ppt/slideLayouts/slideLayout10.xml><?xml version="1.0" encoding="utf-8"?>
+<file path=ppt\slideLayouts\slideLayout10.xml><?xml version="1.0" encoding="utf-8"?>
 <p:sldLayout xmlns:a="http://schemas.openxmlformats.org/drawingml/2006/main" xmlns:r="http://schemas.openxmlformats.org/officeDocument/2006/relationships" xmlns:p="http://schemas.openxmlformats.org/presentationml/2006/main" type="vertTx" preserve="1">
   <p:cSld name="Title and Vertical Text">
     <p:spTree>
@@ -525,7 +596,7 @@
 </p:sldLayout>
 </file>
 
-<file path=ppt/slideLayouts/slideLayout11.xml><?xml version="1.0" encoding="utf-8"?>
+<file path=ppt\slideLayouts\slideLayout11.xml><?xml version="1.0" encoding="utf-8"?>
 <p:sldLayout xmlns:a="http://schemas.openxmlformats.org/drawingml/2006/main" xmlns:r="http://schemas.openxmlformats.org/officeDocument/2006/relationships" xmlns:p="http://schemas.openxmlformats.org/presentationml/2006/main" type="vertTitleAndTx" preserve="1">
   <p:cSld name="Vertical Title and Text">
     <p:spTree>
@@ -705,7 +776,7 @@
 </p:sldLayout>
 </file>
 
-<file path=ppt/slideLayouts/slideLayout2.xml><?xml version="1.0" encoding="utf-8"?>
+<file path=ppt\slideLayouts\slideLayout2.xml><?xml version="1.0" encoding="utf-8"?>
 <p:sldLayout xmlns:a="http://schemas.openxmlformats.org/drawingml/2006/main" xmlns:r="http://schemas.openxmlformats.org/officeDocument/2006/relationships" xmlns:p="http://schemas.openxmlformats.org/presentationml/2006/main" type="obj" preserve="1">
   <p:cSld name="Title and Content">
     <p:spTree>
@@ -875,7 +946,7 @@
 </p:sldLayout>
 </file>
 
-<file path=ppt/slideLayouts/slideLayout3.xml><?xml version="1.0" encoding="utf-8"?>
+<file path=ppt\slideLayouts\slideLayout3.xml><?xml version="1.0" encoding="utf-8"?>
 <p:sldLayout xmlns:a="http://schemas.openxmlformats.org/drawingml/2006/main" xmlns:r="http://schemas.openxmlformats.org/officeDocument/2006/relationships" xmlns:p="http://schemas.openxmlformats.org/presentationml/2006/main" type="secHead" preserve="1">
   <p:cSld name="Section Header">
     <p:spTree>
@@ -1121,7 +1192,7 @@
 </p:sldLayout>
 </file>
 
-<file path=ppt/slideLayouts/slideLayout4.xml><?xml version="1.0" encoding="utf-8"?>
+<file path=ppt\slideLayouts\slideLayout4.xml><?xml version="1.0" encoding="utf-8"?>
 <p:sldLayout xmlns:a="http://schemas.openxmlformats.org/drawingml/2006/main" xmlns:r="http://schemas.openxmlformats.org/officeDocument/2006/relationships" xmlns:p="http://schemas.openxmlformats.org/presentationml/2006/main" type="twoObj" preserve="1">
   <p:cSld name="Two Content">
     <p:spTree>
@@ -1409,7 +1480,7 @@
 </p:sldLayout>
 </file>
 
-<file path=ppt/slideLayouts/slideLayout5.xml><?xml version="1.0" encoding="utf-8"?>
+<file path=ppt\slideLayouts\slideLayout5.xml><?xml version="1.0" encoding="utf-8"?>
 <p:sldLayout xmlns:a="http://schemas.openxmlformats.org/drawingml/2006/main" xmlns:r="http://schemas.openxmlformats.org/officeDocument/2006/relationships" xmlns:p="http://schemas.openxmlformats.org/presentationml/2006/main" type="twoTxTwoObj" preserve="1">
   <p:cSld name="Comparison">
     <p:spTree>
@@ -1831,7 +1902,7 @@
 </p:sldLayout>
 </file>
 
-<file path=ppt/slideLayouts/slideLayout6.xml><?xml version="1.0" encoding="utf-8"?>
+<file path=ppt\slideLayouts\slideLayout6.xml><?xml version="1.0" encoding="utf-8"?>
 <p:sldLayout xmlns:a="http://schemas.openxmlformats.org/drawingml/2006/main" xmlns:r="http://schemas.openxmlformats.org/officeDocument/2006/relationships" xmlns:p="http://schemas.openxmlformats.org/presentationml/2006/main" type="titleOnly" preserve="1">
   <p:cSld name="Title Only">
     <p:spTree>
@@ -1949,7 +2020,7 @@
 </p:sldLayout>
 </file>
 
-<file path=ppt/slideLayouts/slideLayout7.xml><?xml version="1.0" encoding="utf-8"?>
+<file path=ppt\slideLayouts\slideLayout7.xml><?xml version="1.0" encoding="utf-8"?>
 <p:sldLayout xmlns:a="http://schemas.openxmlformats.org/drawingml/2006/main" xmlns:r="http://schemas.openxmlformats.org/officeDocument/2006/relationships" xmlns:p="http://schemas.openxmlformats.org/presentationml/2006/main" type="blank" preserve="1">
   <p:cSld name="Blank">
     <p:spTree>
@@ -2044,7 +2115,7 @@
 </p:sldLayout>
 </file>
 
-<file path=ppt/slideLayouts/slideLayout8.xml><?xml version="1.0" encoding="utf-8"?>
+<file path=ppt\slideLayouts\slideLayout8.xml><?xml version="1.0" encoding="utf-8"?>
 <p:sldLayout xmlns:a="http://schemas.openxmlformats.org/drawingml/2006/main" xmlns:r="http://schemas.openxmlformats.org/officeDocument/2006/relationships" xmlns:p="http://schemas.openxmlformats.org/presentationml/2006/main" type="objTx" preserve="1">
   <p:cSld name="Content with Caption">
     <p:spTree>
@@ -2321,7 +2392,7 @@
 </p:sldLayout>
 </file>
 
-<file path=ppt/slideLayouts/slideLayout9.xml><?xml version="1.0" encoding="utf-8"?>
+<file path=ppt\slideLayouts\slideLayout9.xml><?xml version="1.0" encoding="utf-8"?>
 <p:sldLayout xmlns:a="http://schemas.openxmlformats.org/drawingml/2006/main" xmlns:r="http://schemas.openxmlformats.org/officeDocument/2006/relationships" xmlns:p="http://schemas.openxmlformats.org/presentationml/2006/main" type="picTx" preserve="1">
   <p:cSld name="Picture with Caption">
     <p:spTree>
@@ -2574,7 +2645,7 @@
 </p:sldLayout>
 </file>
 
-<file path=ppt/slideMasters/slideMaster1.xml><?xml version="1.0" encoding="utf-8"?>
+<file path=ppt\slideMasters\slideMaster1.xml><?xml version="1.0" encoding="utf-8"?>
 <p:sldMaster xmlns:a="http://schemas.openxmlformats.org/drawingml/2006/main" xmlns:r="http://schemas.openxmlformats.org/officeDocument/2006/relationships" xmlns:p="http://schemas.openxmlformats.org/presentationml/2006/main">
   <p:cSld>
     <p:bg>
@@ -3084,7 +3155,7 @@
 </p:sldMaster>
 </file>
 
-<file path=ppt/slides/slide1.xml><?xml version="1.0" encoding="utf-8"?>
+<file path=ppt\slides\slide1.xml><?xml version="1.0" encoding="utf-8"?>
 <p:sld xmlns:a="http://schemas.openxmlformats.org/drawingml/2006/main" xmlns:p="http://schemas.openxmlformats.org/presentationml/2006/main" xmlns:r="http://schemas.openxmlformats.org/officeDocument/2006/relationships">
   <p:cSld>
     <p:spTree>
@@ -3477,7 +3548,7 @@
 </p:sld>
 </file>
 
-<file path=ppt/slides/slide2.xml><?xml version="1.0" encoding="utf-8"?>
+<file path=ppt\slides\slide2.xml><?xml version="1.0" encoding="utf-8"?>
 <p:sld xmlns:a="http://schemas.openxmlformats.org/drawingml/2006/main" xmlns:p="http://schemas.openxmlformats.org/presentationml/2006/main" xmlns:r="http://schemas.openxmlformats.org/officeDocument/2006/relationships">
   <p:cSld>
     <p:spTree>
@@ -4045,7 +4116,7 @@
                   <a:srgbClr val="64748B"/>
                 </a:solidFill>
               </a:rPr>
-              <a:t>Deep neural network fits in only 619 bytes SRAM and evaluates risks in 42 µs, providing 100% offline continuous triage during infrastructure blackouts.</a:t>
+              <a:t>Deep neural network fits in only 619 bytes of INT8 weights, providing 100% offline continuous triage during infrastructure blackouts.</a:t>
             </a:r>
           </a:p>
           <a:p>
@@ -4135,7 +4206,7 @@
 </p:sld>
 </file>
 
-<file path=ppt/slides/slide3.xml><?xml version="1.0" encoding="utf-8"?>
+<file path=ppt\slides\slide3.xml><?xml version="1.0" encoding="utf-8"?>
 <p:sld xmlns:a="http://schemas.openxmlformats.org/drawingml/2006/main" xmlns:p="http://schemas.openxmlformats.org/presentationml/2006/main" xmlns:r="http://schemas.openxmlformats.org/officeDocument/2006/relationships">
   <p:cSld>
     <p:spTree>
@@ -5046,7 +5117,7 @@
               </a:defRPr>
             </a:pPr>
             <a:r>
-              <a:t>INT8 deep micro-network running in 42 µs (91.00% validation accuracy).</a:t>
+              <a:t>619-parameter INT8 micro-network (88.47% synthetic validation accuracy).</a:t>
             </a:r>
           </a:p>
         </p:txBody>
@@ -5307,7 +5378,7 @@
 </p:sld>
 </file>
 
-<file path=ppt/slides/slide4.xml><?xml version="1.0" encoding="utf-8"?>
+<file path=ppt\slides\slide4.xml><?xml version="1.0" encoding="utf-8"?>
 <p:sld xmlns:a="http://schemas.openxmlformats.org/drawingml/2006/main" xmlns:p="http://schemas.openxmlformats.org/presentationml/2006/main" xmlns:r="http://schemas.openxmlformats.org/officeDocument/2006/relationships">
   <p:cSld>
     <p:spTree>
@@ -5712,7 +5783,7 @@
               </a:defRPr>
             </a:pPr>
             <a:r>
-              <a:t>17.4%</a:t>
+              <a:t>39.6%</a:t>
             </a:r>
           </a:p>
           <a:p>
@@ -5728,7 +5799,7 @@
             </a:r>
             <a:br/>
             <a:r>
-              <a:t>(195 / 1120)</a:t>
+              <a:t>(443 / 1120)</a:t>
             </a:r>
           </a:p>
         </p:txBody>
@@ -6129,7 +6200,7 @@
 </p:sld>
 </file>
 
-<file path=ppt/slides/slide5.xml><?xml version="1.0" encoding="utf-8"?>
+<file path=ppt\slides\slide5.xml><?xml version="1.0" encoding="utf-8"?>
 <p:sld xmlns:a="http://schemas.openxmlformats.org/drawingml/2006/main" xmlns:p="http://schemas.openxmlformats.org/presentationml/2006/main" xmlns:r="http://schemas.openxmlformats.org/officeDocument/2006/relationships">
   <p:cSld>
     <p:spTree>
@@ -6376,7 +6447,7 @@
               </a:defRPr>
             </a:pPr>
             <a:r>
-              <a:t>91.00%</a:t>
+              <a:t>88.47%</a:t>
             </a:r>
           </a:p>
           <a:p>
@@ -6392,7 +6463,7 @@
             </a:r>
             <a:br/>
             <a:r>
-              <a:t>(10,000 extreme edge condition test vectors)</a:t>
+              <a:t>(6,200-sample held-out validation split)</a:t>
             </a:r>
           </a:p>
         </p:txBody>
@@ -6472,7 +6543,7 @@
               </a:defRPr>
             </a:pPr>
             <a:r>
-              <a:t>92.05%</a:t>
+              <a:t>94.11%</a:t>
             </a:r>
           </a:p>
           <a:p>
@@ -6580,11 +6651,11 @@
               </a:defRPr>
             </a:pPr>
             <a:r>
-              <a:t>Ultra-Low SRAM Memory Footprint</a:t>
+              <a:t>INT8 Weight Storage</a:t>
             </a:r>
             <a:br/>
             <a:r>
-              <a:t>(Executes in 42 µs with zero cloud)</a:t>
+              <a:t>(Zero cloud dependency)</a:t>
             </a:r>
           </a:p>
         </p:txBody>
@@ -6967,7 +7038,7 @@
 </p:sld>
 </file>
 
-<file path=ppt/slides/slide6.xml><?xml version="1.0" encoding="utf-8"?>
+<file path=ppt\slides\slide6.xml><?xml version="1.0" encoding="utf-8"?>
 <p:sld xmlns:a="http://schemas.openxmlformats.org/drawingml/2006/main" xmlns:p="http://schemas.openxmlformats.org/presentationml/2006/main" xmlns:r="http://schemas.openxmlformats.org/officeDocument/2006/relationships">
   <p:cSld>
     <p:spTree>
@@ -7564,7 +7635,7 @@
 </p:sld>
 </file>
 
-<file path=ppt/slides/slide7.xml><?xml version="1.0" encoding="utf-8"?>
+<file path=ppt\slides\slide7.xml><?xml version="1.0" encoding="utf-8"?>
 <p:sld xmlns:a="http://schemas.openxmlformats.org/drawingml/2006/main" xmlns:p="http://schemas.openxmlformats.org/presentationml/2006/main" xmlns:r="http://schemas.openxmlformats.org/officeDocument/2006/relationships">
   <p:cSld>
     <p:spTree>
@@ -8111,7 +8182,11 @@
 </p:sld>
 </file>
 
-<file path=ppt/theme/theme1.xml><?xml version="1.0" encoding="utf-8"?>
+<file path=ppt\tableStyles.xml><?xml version="1.0" encoding="utf-8"?>
+<a:tblStyleLst xmlns:a="http://schemas.openxmlformats.org/drawingml/2006/main" def="{5C22544A-7EE6-4342-B048-85BDC9FD1C3A}"/>
+</file>
+
+<file path=ppt\theme\theme1.xml><?xml version="1.0" encoding="utf-8"?>
 <a:theme xmlns:a="http://schemas.openxmlformats.org/drawingml/2006/main" name="Office Theme">
   <a:themeElements>
     <a:clrScheme name="Office">
@@ -8429,4 +8504,38 @@
   </a:objectDefaults>
   <a:extraClrSchemeLst/>
 </a:theme>
+</file>
+
+<file path=ppt\viewProps.xml><?xml version="1.0" encoding="utf-8"?>
+<p:viewPr xmlns:a="http://schemas.openxmlformats.org/drawingml/2006/main" xmlns:r="http://schemas.openxmlformats.org/officeDocument/2006/relationships" xmlns:p="http://schemas.openxmlformats.org/presentationml/2006/main" lastView="sldThumbnailView">
+  <p:normalViewPr>
+    <p:restoredLeft sz="15620"/>
+    <p:restoredTop sz="94660"/>
+  </p:normalViewPr>
+  <p:slideViewPr>
+    <p:cSldViewPr snapToGrid="0" snapToObjects="1">
+      <p:cViewPr varScale="1">
+        <p:scale>
+          <a:sx n="124" d="100"/>
+          <a:sy n="124" d="100"/>
+        </p:scale>
+        <p:origin x="-1512" y="-112"/>
+      </p:cViewPr>
+      <p:guideLst>
+        <p:guide orient="horz" pos="2160"/>
+        <p:guide pos="2880"/>
+      </p:guideLst>
+    </p:cSldViewPr>
+  </p:slideViewPr>
+  <p:notesTextViewPr>
+    <p:cViewPr>
+      <p:scale>
+        <a:sx n="100" d="100"/>
+        <a:sy n="100" d="100"/>
+      </p:scale>
+      <p:origin x="0" y="0"/>
+    </p:cViewPr>
+  </p:notesTextViewPr>
+  <p:gridSpacing cx="76200" cy="76200"/>
+</p:viewPr>
 </file>